--- a/output/skill-comparison/anthropic-pptx/AIOps_조별 과제_광주_3반_GroundWatch.pptx
+++ b/output/skill-comparison/anthropic-pptx/AIOps_조별 과제_광주_3반_GroundWatch.pptx
@@ -1297,8 +1297,8 @@
           <a:p>
             <a:r>
               <a:rPr lang="en-US" dirty="0"/>
-              <a:t>최신 전체 현황 화면입니다. 별도로 학습한 합성 확장 모델 25개가 준비되었고 입력 기준일은 오늘 10월 8일, 예측 대상일은 9일입니다. 화면에서 합성 확장 자료임을 표시하며 실제 최신 서울 관측이라고 설명하지 않습니다. 캡처는 안내 배너를 짧게 바꾸기 전 저장한 원본입니다. 현재 화면은 짧은 합성 출처 안내를 표시하고, 생성 방법과 기간은 안내의 상세 설명과 팀 문서에서 확인합니다. 기본 모드는 오늘 기준 예측이며 과거 관측 검증은 별도 모드입니다. 원본 캡처는 수정하지 않았습니다.
-근거: team/evidence/current-extension-overview.png; team/evidence/current-extension-http.json</a:t>
+              <a:t>지하안전 업무 담당자는 관측소 현황에서 구나 관측소를 검색하고 상세 보기를 누릅니다. 입력 기준일과 예측 대상일을 구분하여 확인합니다. 기본 화면은 공식 과거 관측에 합성 자료를 확장한 모델의 다음 날 예측입니다. 실제 최신 서울 관측값을 수집했다는 뜻은 아닙니다. 25개 관측소가 준비된 실제 화면입니다.
+근거: team/evidence/ui-comparison-overview.png; team/evidence/current-extension-http.json</a:t>
             </a:r>
             <a:endParaRPr lang="en-US" dirty="0"/>
           </a:p>
@@ -1386,8 +1386,8 @@
           <a:p>
             <a:r>
               <a:rPr lang="en-US" dirty="0"/>
-              <a:t>종로 관측소 상세입니다. 최종 화면의 모델 버전 2가 10월 8일까지의 합성 확장 입력으로 9일 수위를 예측했습니다. 내일 정답은 아직 없으므로 관측과 강수를 null로 표시합니다. 선 그래프는 합성 확장 구간을 포함하며 현장 성능의 근거가 아닙니다.
-근거: team/evidence/current-extension-detail.png; team/evidence/current-extension-http.json</a:t>
+              <a:t>같은 날짜의 입력 수위와 저장된 예측이 모두 있으면 소수 셋째 자리로 비교합니다. 입력이 더 높으면 해당 숫자와 관측점만 빨강, 낮으면 파랑이며 같거나 비교 예측이 없으면 기본색입니다. 내일 예측은 주황을 유지합니다. 이 색은 위험도나 드리프트 판정이 아닙니다. 이 상세 캡처는 저장 자료 검증의 2026년 7월 31일 입력과 8월 1일 예측입니다. 오늘 예측 캡처와 기준일이 다릅니다. 상세 상단에서 다음 날 예측 날짜와 수위, 마지막 입력값과의 차이를 먼저 봅니다. 그래프는 최근 30일이 기본이고 90일 또는 180일로 바꿀 수 있습니다. 관측소 선택으로 대상을 변경합니다. 내일 정답은 아직 없으므로 오차는 평가 대기입니다. 최근 구간은 합성 입력이므로 실제 현장 예측 성능으로 해석하지 않습니다. 자료와 모델 정보는 접어서 제공합니다.
+근거: team/evidence/ui-comparison-detail.png; team/serving_app/static/groundwatch.js</a:t>
             </a:r>
             <a:endParaRPr lang="en-US" dirty="0"/>
           </a:p>
@@ -1475,8 +1475,8 @@
           <a:p>
             <a:r>
               <a:rPr lang="en-US" dirty="0"/>
-              <a:t>전체 현황과 관측소 상세를 확인한 뒤 모델 품질 운영으로 이동합니다. 자료 검증, 오차 감시, 품질 경보, 재학습, 후보 평가, 모델 교체, 현재 모델 서빙의 7단계를 확인합니다. 현재 자료 검증과 모델 v2 서빙은 완료되어 있고 정답 미도착으로 오차 감시부터 후보 교체까지 대기 상태임을 구분합니다. 작업과 이벤트를 함께 확인하고 문제가 생기면 기존 모델 유지와 복귀 이력을 확인합니다. 오늘 기준 자료는 기존 공식 원관측을 보존한 별도 합성 확장이며 최신 실시간 API 관측이 아닙니다. 수동 CSV와 manifest 등록, 초기 학습 및 과거 자료 재생은 접힌 내부 관리 기능으로 보존하고 주 시연 동선에서는 제외합니다. 현재 화면의 과거 자료 모드 명칭은 과거 관측 검증입니다. 초기 자료 준비는 서버 기동 시 자동으로 수행되며 사용자의 CSV 입력이 기본 예측의 필수 단계는 아닙니다.
-근거: team/evidence/current-extension-operations.png; team/evidence/current-extension-http.json</a:t>
+              <a:t>이 화면은 서비스 운영자와 발표 시연용입니다. 저장 자료로 검증 모드에서 기본 상황 시연 또는 수위 변화 시연을 시작합니다. 수위 변화는 입력에 0.2m를 더한 모의 상황이며 원본을 변경하지 않습니다. 저장 자료 1일 진행 또는 21일 진행으로 자료를 날짜순 공개합니다. 준비 중 로딩과 완료 일수, 재학습 진행, 평가 대기 및 실패를 동적으로 표시하고 처리 중 중복 실행을 막습니다. 정답이 부족하면 후보 평가가 대기하며 기준을 통과한 후보만 교체합니다. 이전 모델 복귀는 사유 입력 없이 버튼으로 수행합니다. 기존 공급 재생의 중복 UI는 제거했고 API와 과거 증거는 보존했습니다. CSV와 manifest 등록 및 수동 학습은 접힌 수동 자료 관리 기능이며 기본 예측의 필수 단계가 아닙니다. CSV 등록 HTTP 근거는 있으며 현재 브라우저 파일 선택 검증은 확장 권한 오류로 완료하지 못했습니다.
+근거: team/evidence/ui-drift-progress.png; team/evidence/ui-rollback-simple.png; team/evidence/current-extension-upload-http.json</a:t>
             </a:r>
             <a:endParaRPr lang="en-US" dirty="0"/>
           </a:p>
@@ -6154,7 +6154,7 @@
                 <a:ea typeface="Arial Unicode MS" pitchFamily="34" charset="-122"/>
                 <a:cs typeface="Arial Unicode MS" pitchFamily="34" charset="-120"/>
               </a:rPr>
-              <a:t>01 전체 현황</a:t>
+              <a:t>01 관측소 현황</a:t>
             </a:r>
             <a:endParaRPr lang="en-US" sz="3600" dirty="0"/>
           </a:p>
@@ -6196,7 +6196,7 @@
                 <a:ea typeface="Arial Unicode MS" pitchFamily="34" charset="-122"/>
                 <a:cs typeface="Arial Unicode MS" pitchFamily="34" charset="-120"/>
               </a:rPr>
-              <a:t>오늘 기준 합성 확장 모델 25개 준비</a:t>
+              <a:t>관측소를 검색하고 상세 보기를 선택합니다</a:t>
             </a:r>
             <a:endParaRPr lang="en-US" sz="2000" dirty="0"/>
           </a:p>
@@ -6204,7 +6204,7 @@
       </p:sp>
       <p:pic>
         <p:nvPicPr>
-          <p:cNvPr id="5" name="Image 0" descr="/private/tmp/gw-anthropic-redesign/current-extension-overview-crop.png">    </p:cNvPr>
+          <p:cNvPr id="5" name="Image 0" descr="/Users/baggeon-u/Desktop/skala/skala-tasks/w14-model-serving-aiops/team/evidence/ui-comparison-overview.png">    </p:cNvPr>
           <p:cNvPicPr>
             <a:picLocks noChangeAspect="1"/>
           </p:cNvPicPr>
@@ -6218,8 +6218,8 @@
         </p:blipFill>
         <p:spPr>
           <a:xfrm>
-            <a:off x="3163364" y="2560320"/>
-            <a:ext cx="5834793" cy="3566160"/>
+            <a:off x="2325853" y="2514600"/>
+            <a:ext cx="7509814" cy="3749040"/>
           </a:xfrm>
           <a:prstGeom prst="rect">
             <a:avLst/>
@@ -6262,7 +6262,7 @@
                 <a:ea typeface="Arial Unicode MS" pitchFamily="34" charset="-122"/>
                 <a:cs typeface="Arial Unicode MS" pitchFamily="34" charset="-120"/>
               </a:rPr>
-              <a:t>원본 화면 일부 확대. 입력 기준 2026-10-08, 다음 날 10-09 예측이며 합성 자료 표시를 유지합니다</a:t>
+              <a:t>2026-10-08 입력 → 10-09 예측 / 합성 자료 포함 / 25개 관측소 준비</a:t>
             </a:r>
             <a:endParaRPr lang="en-US" sz="1200" dirty="0"/>
           </a:p>
@@ -6420,7 +6420,7 @@
                 <a:ea typeface="Arial Unicode MS" pitchFamily="34" charset="-122"/>
                 <a:cs typeface="Arial Unicode MS" pitchFamily="34" charset="-120"/>
               </a:rPr>
-              <a:t>오늘까지의 입력과 내일 예측을 구분합니다</a:t>
+              <a:t>예측값과 최근 입력을 비교합니다</a:t>
             </a:r>
             <a:endParaRPr lang="en-US" sz="2000" dirty="0"/>
           </a:p>
@@ -6428,7 +6428,7 @@
       </p:sp>
       <p:pic>
         <p:nvPicPr>
-          <p:cNvPr id="5" name="Image 0" descr="/private/tmp/gw-anthropic-redesign/current-extension-detail-crop.png">    </p:cNvPr>
+          <p:cNvPr id="5" name="Image 0" descr="/Users/baggeon-u/Desktop/skala/skala-tasks/w14-model-serving-aiops/team/evidence/ui-comparison-detail.png">    </p:cNvPr>
           <p:cNvPicPr>
             <a:picLocks noChangeAspect="1"/>
           </p:cNvPicPr>
@@ -6442,8 +6442,8 @@
         </p:blipFill>
         <p:spPr>
           <a:xfrm>
-            <a:off x="2869969" y="2560320"/>
-            <a:ext cx="6421582" cy="3566160"/>
+            <a:off x="2325853" y="2514600"/>
+            <a:ext cx="7509814" cy="3749040"/>
           </a:xfrm>
           <a:prstGeom prst="rect">
             <a:avLst/>
@@ -6486,7 +6486,7 @@
                 <a:ea typeface="Arial Unicode MS" pitchFamily="34" charset="-122"/>
                 <a:cs typeface="Arial Unicode MS" pitchFamily="34" charset="-120"/>
               </a:rPr>
-              <a:t>원본 화면 일부 확대. 종로 모델 v2, 오늘까지의 합성 입력과 다음 날 예측을 구분합니다</a:t>
+              <a:t>예측 날짜·수위·마지막 입력값과의 차이 / 기본 30일, 90·180일 전환</a:t>
             </a:r>
             <a:endParaRPr lang="en-US" sz="1200" dirty="0"/>
           </a:p>
@@ -6602,7 +6602,7 @@
                 <a:ea typeface="Arial Unicode MS" pitchFamily="34" charset="-122"/>
                 <a:cs typeface="Arial Unicode MS" pitchFamily="34" charset="-120"/>
               </a:rPr>
-              <a:t>03 모델 품질 운영</a:t>
+              <a:t>03 모델 관리 · 시연</a:t>
             </a:r>
             <a:endParaRPr lang="en-US" sz="3600" dirty="0"/>
           </a:p>
@@ -6644,7 +6644,7 @@
                 <a:ea typeface="Arial Unicode MS" pitchFamily="34" charset="-122"/>
                 <a:cs typeface="Arial Unicode MS" pitchFamily="34" charset="-120"/>
               </a:rPr>
-              <a:t>품질 감시·모델 버전·작업 상태를 확인합니다</a:t>
+              <a:t>저장 자료 진행과 재학습 상태를 확인합니다</a:t>
             </a:r>
             <a:endParaRPr lang="en-US" sz="2000" dirty="0"/>
           </a:p>
@@ -6652,7 +6652,7 @@
       </p:sp>
       <p:pic>
         <p:nvPicPr>
-          <p:cNvPr id="5" name="Image 0" descr="/private/tmp/gw-anthropic-redesign/current-extension-operations-crop.png">    </p:cNvPr>
+          <p:cNvPr id="5" name="Image 0" descr="/Users/baggeon-u/Desktop/skala/skala-tasks/w14-model-serving-aiops/team/evidence/ui-final-operations.png">    </p:cNvPr>
           <p:cNvPicPr>
             <a:picLocks noChangeAspect="1"/>
           </p:cNvPicPr>
@@ -6666,8 +6666,8 @@
         </p:blipFill>
         <p:spPr>
           <a:xfrm>
-            <a:off x="1434087" y="2560320"/>
-            <a:ext cx="5361425" cy="3566160"/>
+            <a:off x="2091690" y="2514600"/>
+            <a:ext cx="7978140" cy="3749040"/>
           </a:xfrm>
           <a:prstGeom prst="rect">
             <a:avLst/>
@@ -6677,134 +6677,6 @@
       <p:sp>
         <p:nvSpPr>
           <p:cNvPr id="6" name="Text 3"/>
-          <p:cNvSpPr/>
-          <p:nvPr/>
-        </p:nvSpPr>
-        <p:spPr>
-          <a:xfrm>
-            <a:off x="7863840" y="2651760"/>
-            <a:ext cx="3474720" cy="594360"/>
-          </a:xfrm>
-          <a:prstGeom prst="rect">
-            <a:avLst/>
-          </a:prstGeom>
-          <a:noFill/>
-          <a:ln/>
-        </p:spPr>
-        <p:txBody>
-          <a:bodyPr wrap="square" lIns="0" tIns="0" rIns="0" bIns="0" rtlCol="0" anchor="ctr"/>
-          <a:lstStyle/>
-          <a:p>
-            <a:pPr algn="l" indent="0" marL="0">
-              <a:spcAft>
-                <a:spcPts val="400"/>
-              </a:spcAft>
-              <a:buNone/>
-            </a:pPr>
-            <a:r>
-              <a:rPr lang="en-US" sz="2500" b="1" dirty="0">
-                <a:solidFill>
-                  <a:srgbClr val="111111"/>
-                </a:solidFill>
-                <a:latin typeface="Arial Unicode MS" pitchFamily="34" charset="0"/>
-                <a:ea typeface="Arial Unicode MS" pitchFamily="34" charset="-122"/>
-                <a:cs typeface="Arial Unicode MS" pitchFamily="34" charset="-120"/>
-              </a:rPr>
-              <a:t>현재 모델 v2 서빙</a:t>
-            </a:r>
-            <a:endParaRPr lang="en-US" sz="2500" dirty="0"/>
-          </a:p>
-        </p:txBody>
-      </p:sp>
-      <p:sp>
-        <p:nvSpPr>
-          <p:cNvPr id="7" name="Text 4"/>
-          <p:cNvSpPr/>
-          <p:nvPr/>
-        </p:nvSpPr>
-        <p:spPr>
-          <a:xfrm>
-            <a:off x="7863840" y="3474720"/>
-            <a:ext cx="3474720" cy="960120"/>
-          </a:xfrm>
-          <a:prstGeom prst="rect">
-            <a:avLst/>
-          </a:prstGeom>
-          <a:noFill/>
-          <a:ln/>
-        </p:spPr>
-        <p:txBody>
-          <a:bodyPr wrap="square" lIns="0" tIns="0" rIns="0" bIns="0" rtlCol="0" anchor="ctr"/>
-          <a:lstStyle/>
-          <a:p>
-            <a:pPr algn="l" indent="0" marL="0">
-              <a:spcAft>
-                <a:spcPts val="400"/>
-              </a:spcAft>
-              <a:buNone/>
-            </a:pPr>
-            <a:r>
-              <a:rPr lang="en-US" sz="2200" dirty="0">
-                <a:solidFill>
-                  <a:srgbClr val="666666"/>
-                </a:solidFill>
-                <a:latin typeface="Arial Unicode MS" pitchFamily="34" charset="0"/>
-                <a:ea typeface="Arial Unicode MS" pitchFamily="34" charset="-122"/>
-                <a:cs typeface="Arial Unicode MS" pitchFamily="34" charset="-120"/>
-              </a:rPr>
-              <a:t>정답 도착 전</a:t>
-            </a:r>
-            <a:endParaRPr lang="en-US" sz="2200" dirty="0"/>
-          </a:p>
-          <a:p>
-            <a:pPr algn="l" indent="0" marL="0">
-              <a:spcAft>
-                <a:spcPts val="400"/>
-              </a:spcAft>
-              <a:buNone/>
-            </a:pPr>
-            <a:r>
-              <a:rPr lang="en-US" sz="2200" dirty="0">
-                <a:solidFill>
-                  <a:srgbClr val="666666"/>
-                </a:solidFill>
-                <a:latin typeface="Arial Unicode MS" pitchFamily="34" charset="0"/>
-                <a:ea typeface="Arial Unicode MS" pitchFamily="34" charset="-122"/>
-                <a:cs typeface="Arial Unicode MS" pitchFamily="34" charset="-120"/>
-              </a:rPr>
-              <a:t>오차 감시·후보 평가 대기</a:t>
-            </a:r>
-            <a:endParaRPr lang="en-US" sz="2200" dirty="0"/>
-          </a:p>
-        </p:txBody>
-      </p:sp>
-      <p:pic>
-        <p:nvPicPr>
-          <p:cNvPr id="8" name="Image 1" descr="/private/tmp/gw-anthropic-redesign/current-extension-operations-log.png">    </p:cNvPr>
-          <p:cNvPicPr>
-            <a:picLocks noChangeAspect="1"/>
-          </p:cNvPicPr>
-          <p:nvPr/>
-        </p:nvPicPr>
-        <p:blipFill>
-          <a:blip r:embed="rId2"/>
-          <a:stretch>
-            <a:fillRect/>
-          </a:stretch>
-        </p:blipFill>
-        <p:spPr>
-          <a:xfrm>
-            <a:off x="7863840" y="4981402"/>
-            <a:ext cx="3474720" cy="552796"/>
-          </a:xfrm>
-          <a:prstGeom prst="rect">
-            <a:avLst/>
-          </a:prstGeom>
-        </p:spPr>
-      </p:pic>
-      <p:sp>
-        <p:nvSpPr>
-          <p:cNvPr id="9" name="Text 5"/>
           <p:cNvSpPr/>
           <p:nvPr/>
         </p:nvSpPr>
@@ -6838,7 +6710,7 @@
                 <a:ea typeface="Arial Unicode MS" pitchFamily="34" charset="-122"/>
                 <a:cs typeface="Arial Unicode MS" pitchFamily="34" charset="-120"/>
               </a:rPr>
-              <a:t>원본 화면 일부 확대. 7단계 상태와 실제 작업 로그를 구분해 확인합니다</a:t>
+              <a:t>로딩·완료 일수·재학습·평가 대기·실패 표시 / 처리 중 중복 실행 차단</a:t>
             </a:r>
             <a:endParaRPr lang="en-US" sz="1200" dirty="0"/>
           </a:p>
